--- a/Sem1/Algorithms/Chapters_Notes/Ch22-Shortest-Paths.pptx
+++ b/Sem1/Algorithms/Chapters_Notes/Ch22-Shortest-Paths.pptx
@@ -150,6 +150,35 @@
 </p:presentation>
 </file>
 
+<file path=ppt/changesInfos/changesInfo1.xml><?xml version="1.0" encoding="utf-8"?>
+<pc:chgInfo xmlns:a="http://schemas.openxmlformats.org/drawingml/2006/main" xmlns:r="http://schemas.openxmlformats.org/officeDocument/2006/relationships" xmlns:ac="http://schemas.microsoft.com/office/drawing/2013/main/command" xmlns:pc="http://schemas.microsoft.com/office/powerpoint/2013/main/command">
+  <pc:docChgLst>
+    <pc:chgData name="Visesh Bentula" userId="5243385d4042bccd" providerId="LiveId" clId="{97B20B2C-92F0-454F-A89B-811AF8123318}"/>
+    <pc:docChg chg="custSel modSld">
+      <pc:chgData name="Visesh Bentula" userId="5243385d4042bccd" providerId="LiveId" clId="{97B20B2C-92F0-454F-A89B-811AF8123318}" dt="2025-05-12T23:26:43.184" v="1" actId="27636"/>
+      <pc:docMkLst>
+        <pc:docMk/>
+      </pc:docMkLst>
+      <pc:sldChg chg="modSp mod">
+        <pc:chgData name="Visesh Bentula" userId="5243385d4042bccd" providerId="LiveId" clId="{97B20B2C-92F0-454F-A89B-811AF8123318}" dt="2025-05-12T23:26:43.184" v="1" actId="27636"/>
+        <pc:sldMkLst>
+          <pc:docMk/>
+          <pc:sldMk cId="3580263918" sldId="289"/>
+        </pc:sldMkLst>
+        <pc:spChg chg="mod">
+          <ac:chgData name="Visesh Bentula" userId="5243385d4042bccd" providerId="LiveId" clId="{97B20B2C-92F0-454F-A89B-811AF8123318}" dt="2025-05-12T23:26:43.184" v="1" actId="27636"/>
+          <ac:spMkLst>
+            <pc:docMk/>
+            <pc:sldMk cId="3580263918" sldId="289"/>
+            <ac:spMk id="5" creationId="{00000000-0000-0000-0000-000000000000}"/>
+          </ac:spMkLst>
+        </pc:spChg>
+      </pc:sldChg>
+    </pc:docChg>
+  </pc:docChgLst>
+</pc:chgInfo>
+</file>
+
 <file path=ppt/handoutMasters/handoutMaster1.xml><?xml version="1.0" encoding="utf-8"?>
 <p:handoutMaster xmlns:a="http://schemas.openxmlformats.org/drawingml/2006/main" xmlns:r="http://schemas.openxmlformats.org/officeDocument/2006/relationships" xmlns:p="http://schemas.openxmlformats.org/presentationml/2006/main">
   <p:cSld>
@@ -232,7 +261,7 @@
           <a:p>
             <a:fld id="{5F3E9484-A1AE-4848-978F-DB84137331BF}" type="datetimeFigureOut">
               <a:rPr lang="en-US" smtClean="0"/>
-              <a:t>4/7/2025</a:t>
+              <a:t>5/12/2025</a:t>
             </a:fld>
             <a:endParaRPr lang="en-US"/>
           </a:p>
@@ -1010,7 +1039,7 @@
           <a:p>
             <a:fld id="{B843F6B6-C643-EB48-8E20-B61919A653AE}" type="datetimeFigureOut">
               <a:rPr lang="en-US" smtClean="0"/>
-              <a:t>4/7/2025</a:t>
+              <a:t>5/11/2025</a:t>
             </a:fld>
             <a:endParaRPr lang="en-US"/>
           </a:p>
@@ -27729,7 +27758,7 @@
         </p:spPr>
         <p:txBody>
           <a:bodyPr>
-            <a:normAutofit/>
+            <a:normAutofit fontScale="85000" lnSpcReduction="10000"/>
           </a:bodyPr>
           <a:lstStyle/>
           <a:p>
@@ -27850,7 +27879,10 @@
           </a:p>
           <a:p>
             <a:pPr eaLnBrk="1" hangingPunct="1"/>
-            <a:endParaRPr lang="en-US" altLang="en-US" dirty="0"/>
+            <a:r>
+              <a:rPr lang="en-US" altLang="en-US" dirty="0"/>
+              <a:t>0</a:t>
+            </a:r>
           </a:p>
         </p:txBody>
       </p:sp>
